--- a/Monocle-demo.pptx
+++ b/Monocle-demo.pptx
@@ -2219,7 +2219,7 @@
                 <a:ea typeface="Georgia" pitchFamily="34" charset="-122"/>
                 <a:cs typeface="Georgia" pitchFamily="34" charset="-120"/>
               </a:rPr>
-              <a:t>See finality</a:t>
+              <a:t>Finality, explained</a:t>
             </a:r>
             <a:endParaRPr lang="en-US" sz="4400" dirty="0"/>
           </a:p>
@@ -2236,7 +2236,7 @@
                 <a:ea typeface="Georgia" pitchFamily="34" charset="-122"/>
                 <a:cs typeface="Georgia" pitchFamily="34" charset="-120"/>
               </a:rPr>
-              <a:t>reach the summit.</a:t>
+              <a:t>check by check.</a:t>
             </a:r>
             <a:endParaRPr lang="en-US" sz="4400" dirty="0"/>
           </a:p>
@@ -2275,7 +2275,7 @@
                 <a:ea typeface="Calibri" pitchFamily="34" charset="-122"/>
                 <a:cs typeface="Calibri" pitchFamily="34" charset="-120"/>
               </a:rPr>
-              <a:t>A finality debugger for Solana's Alpenglow consensus. It names the check that stopped it.</a:t>
+              <a:t>An open-source debugger for Solana's Alpenglow consensus.</a:t>
             </a:r>
             <a:endParaRPr lang="en-US" sz="2000" dirty="0"/>
           </a:p>
@@ -4077,12 +4077,12 @@
         </p:nvSpPr>
         <p:spPr>
           <a:xfrm>
-            <a:off x="640080" y="2011680"/>
-            <a:ext cx="3429000" cy="1783080"/>
+            <a:off x="640080" y="2103120"/>
+            <a:ext cx="2514600" cy="2743200"/>
           </a:xfrm>
           <a:prstGeom prst="roundRect">
             <a:avLst>
-              <a:gd name="adj" fmla="val 6154"/>
+              <a:gd name="adj" fmla="val 4364"/>
             </a:avLst>
           </a:prstGeom>
           <a:solidFill>
@@ -4104,8 +4104,8 @@
         </p:nvSpPr>
         <p:spPr>
           <a:xfrm>
-            <a:off x="914400" y="2103120"/>
-            <a:ext cx="2834640" cy="1005840"/>
+            <a:off x="914400" y="2377440"/>
+            <a:ext cx="2011680" cy="1371600"/>
           </a:xfrm>
           <a:prstGeom prst="rect">
             <a:avLst/>
@@ -4121,7 +4121,7 @@
               <a:buNone/>
             </a:pPr>
             <a:r>
-              <a:rPr lang="en-US" sz="6000" b="1" dirty="0">
+              <a:rPr lang="en-US" sz="8000" b="1" dirty="0">
                 <a:solidFill>
                   <a:srgbClr val="F6C177"/>
                 </a:solidFill>
@@ -4131,7 +4131,7 @@
               </a:rPr>
               <a:t>32</a:t>
             </a:r>
-            <a:endParaRPr lang="en-US" sz="6000" dirty="0"/>
+            <a:endParaRPr lang="en-US" sz="8000" dirty="0"/>
           </a:p>
         </p:txBody>
       </p:sp>
@@ -4143,8 +4143,8 @@
         </p:nvSpPr>
         <p:spPr>
           <a:xfrm>
-            <a:off x="914400" y="3108960"/>
-            <a:ext cx="2834640" cy="548640"/>
+            <a:off x="914400" y="3886200"/>
+            <a:ext cx="2011680" cy="731520"/>
           </a:xfrm>
           <a:prstGeom prst="rect">
             <a:avLst/>
@@ -4160,7 +4160,7 @@
               <a:buNone/>
             </a:pPr>
             <a:r>
-              <a:rPr lang="en-US" sz="1500" dirty="0">
+              <a:rPr lang="en-US" sz="1700" dirty="0">
                 <a:solidFill>
                   <a:srgbClr val="EEF1F8"/>
                 </a:solidFill>
@@ -4170,7 +4170,7 @@
               </a:rPr>
               <a:t>signed certificate scenarios</a:t>
             </a:r>
-            <a:endParaRPr lang="en-US" sz="1500" dirty="0"/>
+            <a:endParaRPr lang="en-US" sz="1700" dirty="0"/>
           </a:p>
         </p:txBody>
       </p:sp>
@@ -4182,12 +4182,12 @@
         </p:nvSpPr>
         <p:spPr>
           <a:xfrm>
-            <a:off x="4251960" y="2011680"/>
-            <a:ext cx="3429000" cy="1783080"/>
+            <a:off x="3429000" y="2103120"/>
+            <a:ext cx="2514600" cy="2743200"/>
           </a:xfrm>
           <a:prstGeom prst="roundRect">
             <a:avLst>
-              <a:gd name="adj" fmla="val 6154"/>
+              <a:gd name="adj" fmla="val 4364"/>
             </a:avLst>
           </a:prstGeom>
           <a:solidFill>
@@ -4209,8 +4209,8 @@
         </p:nvSpPr>
         <p:spPr>
           <a:xfrm>
-            <a:off x="4526280" y="2103120"/>
-            <a:ext cx="2834640" cy="1005840"/>
+            <a:off x="3703320" y="2377440"/>
+            <a:ext cx="2011680" cy="1371600"/>
           </a:xfrm>
           <a:prstGeom prst="rect">
             <a:avLst/>
@@ -4226,7 +4226,7 @@
               <a:buNone/>
             </a:pPr>
             <a:r>
-              <a:rPr lang="en-US" sz="6000" b="1" dirty="0">
+              <a:rPr lang="en-US" sz="8000" b="1" dirty="0">
                 <a:solidFill>
                   <a:srgbClr val="F29484"/>
                 </a:solidFill>
@@ -4236,7 +4236,7 @@
               </a:rPr>
               <a:t>35</a:t>
             </a:r>
-            <a:endParaRPr lang="en-US" sz="6000" dirty="0"/>
+            <a:endParaRPr lang="en-US" sz="8000" dirty="0"/>
           </a:p>
         </p:txBody>
       </p:sp>
@@ -4248,8 +4248,8 @@
         </p:nvSpPr>
         <p:spPr>
           <a:xfrm>
-            <a:off x="4526280" y="3108960"/>
-            <a:ext cx="2834640" cy="548640"/>
+            <a:off x="3703320" y="3886200"/>
+            <a:ext cx="2011680" cy="731520"/>
           </a:xfrm>
           <a:prstGeom prst="rect">
             <a:avLst/>
@@ -4265,7 +4265,7 @@
               <a:buNone/>
             </a:pPr>
             <a:r>
-              <a:rPr lang="en-US" sz="1500" dirty="0">
+              <a:rPr lang="en-US" sz="1700" dirty="0">
                 <a:solidFill>
                   <a:srgbClr val="EEF1F8"/>
                 </a:solidFill>
@@ -4275,7 +4275,7 @@
               </a:rPr>
               <a:t>finality composition scenarios</a:t>
             </a:r>
-            <a:endParaRPr lang="en-US" sz="1500" dirty="0"/>
+            <a:endParaRPr lang="en-US" sz="1700" dirty="0"/>
           </a:p>
         </p:txBody>
       </p:sp>
@@ -4287,12 +4287,12 @@
         </p:nvSpPr>
         <p:spPr>
           <a:xfrm>
-            <a:off x="640080" y="4023360"/>
-            <a:ext cx="3429000" cy="1783080"/>
+            <a:off x="6217920" y="2103120"/>
+            <a:ext cx="2514600" cy="2743200"/>
           </a:xfrm>
           <a:prstGeom prst="roundRect">
             <a:avLst>
-              <a:gd name="adj" fmla="val 6154"/>
+              <a:gd name="adj" fmla="val 4364"/>
             </a:avLst>
           </a:prstGeom>
           <a:solidFill>
@@ -4314,8 +4314,8 @@
         </p:nvSpPr>
         <p:spPr>
           <a:xfrm>
-            <a:off x="914400" y="4114800"/>
-            <a:ext cx="2834640" cy="1005840"/>
+            <a:off x="6492240" y="2377440"/>
+            <a:ext cx="2011680" cy="1371600"/>
           </a:xfrm>
           <a:prstGeom prst="rect">
             <a:avLst/>
@@ -4331,7 +4331,7 @@
               <a:buNone/>
             </a:pPr>
             <a:r>
-              <a:rPr lang="en-US" sz="6000" b="1" dirty="0">
+              <a:rPr lang="en-US" sz="8000" b="1" dirty="0">
                 <a:solidFill>
                   <a:srgbClr val="9ED6E0"/>
                 </a:solidFill>
@@ -4341,7 +4341,7 @@
               </a:rPr>
               <a:t>33</a:t>
             </a:r>
-            <a:endParaRPr lang="en-US" sz="6000" dirty="0"/>
+            <a:endParaRPr lang="en-US" sz="8000" dirty="0"/>
           </a:p>
         </p:txBody>
       </p:sp>
@@ -4353,8 +4353,8 @@
         </p:nvSpPr>
         <p:spPr>
           <a:xfrm>
-            <a:off x="914400" y="5120640"/>
-            <a:ext cx="2834640" cy="548640"/>
+            <a:off x="6492240" y="3886200"/>
+            <a:ext cx="2011680" cy="731520"/>
           </a:xfrm>
           <a:prstGeom prst="rect">
             <a:avLst/>
@@ -4370,7 +4370,7 @@
               <a:buNone/>
             </a:pPr>
             <a:r>
-              <a:rPr lang="en-US" sz="1500" dirty="0">
+              <a:rPr lang="en-US" sz="1700" dirty="0">
                 <a:solidFill>
                   <a:srgbClr val="EEF1F8"/>
                 </a:solidFill>
@@ -4380,7 +4380,7 @@
               </a:rPr>
               <a:t>Chrome browser tests</a:t>
             </a:r>
-            <a:endParaRPr lang="en-US" sz="1500" dirty="0"/>
+            <a:endParaRPr lang="en-US" sz="1700" dirty="0"/>
           </a:p>
         </p:txBody>
       </p:sp>
@@ -4392,12 +4392,12 @@
         </p:nvSpPr>
         <p:spPr>
           <a:xfrm>
-            <a:off x="4251960" y="4023360"/>
-            <a:ext cx="3429000" cy="1783080"/>
+            <a:off x="9006840" y="2103120"/>
+            <a:ext cx="2514600" cy="2743200"/>
           </a:xfrm>
           <a:prstGeom prst="roundRect">
             <a:avLst>
-              <a:gd name="adj" fmla="val 6154"/>
+              <a:gd name="adj" fmla="val 4364"/>
             </a:avLst>
           </a:prstGeom>
           <a:solidFill>
@@ -4419,8 +4419,8 @@
         </p:nvSpPr>
         <p:spPr>
           <a:xfrm>
-            <a:off x="4526280" y="4114800"/>
-            <a:ext cx="2834640" cy="1005840"/>
+            <a:off x="9281160" y="2377440"/>
+            <a:ext cx="2011680" cy="1371600"/>
           </a:xfrm>
           <a:prstGeom prst="rect">
             <a:avLst/>
@@ -4436,7 +4436,7 @@
               <a:buNone/>
             </a:pPr>
             <a:r>
-              <a:rPr lang="en-US" sz="6000" b="1" dirty="0">
+              <a:rPr lang="en-US" sz="8000" b="1" dirty="0">
                 <a:solidFill>
                   <a:srgbClr val="C77DA8"/>
                 </a:solidFill>
@@ -4446,7 +4446,7 @@
               </a:rPr>
               <a:t>8</a:t>
             </a:r>
-            <a:endParaRPr lang="en-US" sz="6000" dirty="0"/>
+            <a:endParaRPr lang="en-US" sz="8000" dirty="0"/>
           </a:p>
         </p:txBody>
       </p:sp>
@@ -4458,8 +4458,8 @@
         </p:nvSpPr>
         <p:spPr>
           <a:xfrm>
-            <a:off x="4526280" y="5120640"/>
-            <a:ext cx="2834640" cy="548640"/>
+            <a:off x="9281160" y="3886200"/>
+            <a:ext cx="2011680" cy="731520"/>
           </a:xfrm>
           <a:prstGeom prst="rect">
             <a:avLst/>
@@ -4475,7 +4475,7 @@
               <a:buNone/>
             </a:pPr>
             <a:r>
-              <a:rPr lang="en-US" sz="1500" dirty="0">
+              <a:rPr lang="en-US" sz="1700" dirty="0">
                 <a:solidFill>
                   <a:srgbClr val="EEF1F8"/>
                 </a:solidFill>
@@ -4485,7 +4485,7 @@
               </a:rPr>
               <a:t>worker lifecycle tests</a:t>
             </a:r>
-            <a:endParaRPr lang="en-US" sz="1500" dirty="0"/>
+            <a:endParaRPr lang="en-US" sz="1700" dirty="0"/>
           </a:p>
         </p:txBody>
       </p:sp>
@@ -4497,8 +4497,8 @@
         </p:nvSpPr>
         <p:spPr>
           <a:xfrm>
-            <a:off x="640080" y="6035040"/>
-            <a:ext cx="7040880" cy="320040"/>
+            <a:off x="640080" y="5303520"/>
+            <a:ext cx="10881360" cy="365760"/>
           </a:xfrm>
           <a:prstGeom prst="rect">
             <a:avLst/>
@@ -4514,7 +4514,7 @@
               <a:buNone/>
             </a:pPr>
             <a:r>
-              <a:rPr lang="en-US" sz="1300" i="1" dirty="0">
+              <a:rPr lang="en-US" sz="1600" i="1" dirty="0">
                 <a:solidFill>
                   <a:srgbClr val="A7AFCC"/>
                 </a:solidFill>
@@ -4524,94 +4524,7 @@
               </a:rPr>
               <a:t>Plus WCAG A/AA scans and zero-network offline checks.</a:t>
             </a:r>
-            <a:endParaRPr lang="en-US" sz="1300" dirty="0"/>
-          </a:p>
-        </p:txBody>
-      </p:sp>
-      <p:pic>
-        <p:nvPicPr>
-          <p:cNvPr id="17" name="Image 0" descr="Monocle inspector on a phone">    </p:cNvPr>
-          <p:cNvPicPr>
-            <a:picLocks noChangeAspect="1"/>
-          </p:cNvPicPr>
-          <p:nvPr/>
-        </p:nvPicPr>
-        <p:blipFill>
-          <a:blip r:embed="rId1"/>
-          <a:stretch>
-            <a:fillRect/>
-          </a:stretch>
-        </p:blipFill>
-        <p:spPr>
-          <a:xfrm>
-            <a:off x="7955280" y="1554480"/>
-            <a:ext cx="1846402" cy="3998076"/>
-          </a:xfrm>
-          <a:prstGeom prst="rect">
-            <a:avLst/>
-          </a:prstGeom>
-        </p:spPr>
-      </p:pic>
-      <p:pic>
-        <p:nvPicPr>
-          <p:cNvPr id="18" name="Image 1" descr="Monocle landing page on a phone">    </p:cNvPr>
-          <p:cNvPicPr>
-            <a:picLocks noChangeAspect="1"/>
-          </p:cNvPicPr>
-          <p:nvPr/>
-        </p:nvPicPr>
-        <p:blipFill>
-          <a:blip r:embed="rId2"/>
-          <a:stretch>
-            <a:fillRect/>
-          </a:stretch>
-        </p:blipFill>
-        <p:spPr>
-          <a:xfrm>
-            <a:off x="9984562" y="1554480"/>
-            <a:ext cx="1902638" cy="3998076"/>
-          </a:xfrm>
-          <a:prstGeom prst="rect">
-            <a:avLst/>
-          </a:prstGeom>
-        </p:spPr>
-      </p:pic>
-      <p:sp>
-        <p:nvSpPr>
-          <p:cNvPr id="19" name="Text 15"/>
-          <p:cNvSpPr txBox="1"/>
-          <p:nvPr/>
-        </p:nvSpPr>
-        <p:spPr>
-          <a:xfrm>
-            <a:off x="7955280" y="5689716"/>
-            <a:ext cx="3566160" cy="274320"/>
-          </a:xfrm>
-          <a:prstGeom prst="rect">
-            <a:avLst/>
-          </a:prstGeom>
-          <a:noFill/>
-          <a:ln/>
-        </p:spPr>
-        <p:txBody>
-          <a:bodyPr wrap="square" lIns="0" tIns="0" rIns="0" bIns="0" rtlCol="0" anchor="ctr"/>
-          <a:lstStyle/>
-          <a:p>
-            <a:pPr indent="0" marL="0">
-              <a:buNone/>
-            </a:pPr>
-            <a:r>
-              <a:rPr lang="en-US" sz="1200" dirty="0">
-                <a:solidFill>
-                  <a:srgbClr val="8C95B9"/>
-                </a:solidFill>
-                <a:latin typeface="Calibri" pitchFamily="34" charset="0"/>
-                <a:ea typeface="Calibri" pitchFamily="34" charset="-122"/>
-                <a:cs typeface="Calibri" pitchFamily="34" charset="-120"/>
-              </a:rPr>
-              <a:t>Responsive down to 375px</a:t>
-            </a:r>
-            <a:endParaRPr lang="en-US" sz="1200" dirty="0"/>
+            <a:endParaRPr lang="en-US" sz="1600" dirty="0"/>
           </a:p>
         </p:txBody>
       </p:sp>
@@ -4749,7 +4662,7 @@
         </p:nvSpPr>
         <p:spPr>
           <a:xfrm>
-            <a:off x="731520" y="1737360"/>
+            <a:off x="731520" y="1554480"/>
             <a:ext cx="5669280" cy="1737360"/>
           </a:xfrm>
           <a:prstGeom prst="rect">
@@ -4774,34 +4687,90 @@
                 <a:ea typeface="Georgia" pitchFamily="34" charset="-122"/>
                 <a:cs typeface="Georgia" pitchFamily="34" charset="-120"/>
               </a:rPr>
-              <a:t>Start with a signed example.</a:t>
+              <a:t>Try it live.</a:t>
             </a:r>
             <a:endParaRPr lang="en-US" sz="4200" dirty="0"/>
           </a:p>
-        </p:txBody>
-      </p:sp>
-      <p:sp>
-        <p:nvSpPr>
-          <p:cNvPr id="5" name="Shape 2"/>
+          <a:p>
+            <a:pPr indent="0" marL="0">
+              <a:buNone/>
+            </a:pPr>
+            <a:r>
+              <a:rPr lang="en-US" sz="4200" b="1" dirty="0">
+                <a:solidFill>
+                  <a:srgbClr val="EEF1F8"/>
+                </a:solidFill>
+                <a:latin typeface="Georgia" pitchFamily="34" charset="0"/>
+                <a:ea typeface="Georgia" pitchFamily="34" charset="-122"/>
+                <a:cs typeface="Georgia" pitchFamily="34" charset="-120"/>
+              </a:rPr>
+              <a:t>No install needed.</a:t>
+            </a:r>
+            <a:endParaRPr lang="en-US" sz="4200" dirty="0"/>
+          </a:p>
+        </p:txBody>
+      </p:sp>
+      <p:sp>
+        <p:nvSpPr>
+          <p:cNvPr id="5" name="Text 2"/>
+          <p:cNvSpPr txBox="1"/>
+          <p:nvPr/>
+        </p:nvSpPr>
+        <p:spPr>
+          <a:xfrm>
+            <a:off x="731520" y="3383280"/>
+            <a:ext cx="5669280" cy="457200"/>
+          </a:xfrm>
+          <a:prstGeom prst="rect">
+            <a:avLst/>
+          </a:prstGeom>
+          <a:noFill/>
+          <a:ln/>
+        </p:spPr>
+        <p:txBody>
+          <a:bodyPr wrap="square" lIns="0" tIns="0" rIns="0" bIns="0" rtlCol="0" anchor="t"/>
+          <a:lstStyle/>
+          <a:p>
+            <a:pPr indent="0" marL="0">
+              <a:buNone/>
+            </a:pPr>
+            <a:r>
+              <a:rPr lang="en-US" sz="1800" dirty="0">
+                <a:solidFill>
+                  <a:srgbClr val="A7AFCC"/>
+                </a:solidFill>
+                <a:latin typeface="Calibri" pitchFamily="34" charset="0"/>
+                <a:ea typeface="Calibri" pitchFamily="34" charset="-122"/>
+                <a:cs typeface="Calibri" pitchFamily="34" charset="-120"/>
+              </a:rPr>
+              <a:t>Load a signed example, pick its checkpoint, verify.</a:t>
+            </a:r>
+            <a:endParaRPr lang="en-US" sz="1800" dirty="0"/>
+          </a:p>
+        </p:txBody>
+      </p:sp>
+      <p:sp>
+        <p:nvSpPr>
+          <p:cNvPr id="6" name="Shape 3"/>
           <p:cNvSpPr/>
           <p:nvPr/>
         </p:nvSpPr>
         <p:spPr>
           <a:xfrm>
-            <a:off x="731520" y="3657600"/>
-            <a:ext cx="5486400" cy="1325880"/>
+            <a:off x="731520" y="4114800"/>
+            <a:ext cx="5669280" cy="914400"/>
           </a:xfrm>
           <a:prstGeom prst="roundRect">
             <a:avLst>
-              <a:gd name="adj" fmla="val 8276"/>
+              <a:gd name="adj" fmla="val 50000"/>
             </a:avLst>
           </a:prstGeom>
           <a:solidFill>
             <a:srgbClr val="232C52"/>
           </a:solidFill>
-          <a:ln w="12700">
+          <a:ln w="25400">
             <a:solidFill>
-              <a:srgbClr val="232C52"/>
+              <a:srgbClr val="F6C177"/>
             </a:solidFill>
             <a:prstDash val="solid"/>
           </a:ln>
@@ -4809,14 +4778,16 @@
       </p:sp>
       <p:sp>
         <p:nvSpPr>
-          <p:cNvPr id="6" name="Text 3"/>
-          <p:cNvSpPr txBox="1"/>
-          <p:nvPr/>
-        </p:nvSpPr>
-        <p:spPr>
-          <a:xfrm>
-            <a:off x="960120" y="3794760"/>
-            <a:ext cx="5029200" cy="1051560"/>
+          <p:cNvPr id="7" name="Text 4">
+            <a:hlinkClick r:id="rId2" tooltip="Open Monocle"/>
+          </p:cNvPr>
+          <p:cNvSpPr txBox="1"/>
+          <p:nvPr/>
+        </p:nvSpPr>
+        <p:spPr>
+          <a:xfrm>
+            <a:off x="731520" y="4114800"/>
+            <a:ext cx="5669280" cy="914400"/>
           </a:xfrm>
           <a:prstGeom prst="rect">
             <a:avLst/>
@@ -4828,51 +4799,41 @@
           <a:bodyPr wrap="square" lIns="0" tIns="0" rIns="0" bIns="0" rtlCol="0" anchor="ctr"/>
           <a:lstStyle/>
           <a:p>
-            <a:pPr indent="0" marL="0">
-              <a:buNone/>
-            </a:pPr>
-            <a:r>
-              <a:rPr lang="en-US" sz="1400" dirty="0">
-                <a:solidFill>
-                  <a:srgbClr val="9ED6E0"/>
-                </a:solidFill>
-                <a:latin typeface="Courier New" pitchFamily="34" charset="0"/>
-                <a:ea typeface="Courier New" pitchFamily="34" charset="-122"/>
-                <a:cs typeface="Courier New" pitchFamily="34" charset="-120"/>
-              </a:rPr>
-              <a:t>npm ci --ignore-scripts --no-audit --no-fund</a:t>
-            </a:r>
-            <a:endParaRPr lang="en-US" sz="1400" dirty="0"/>
-          </a:p>
-          <a:p>
-            <a:pPr indent="0" marL="0">
-              <a:buNone/>
-            </a:pPr>
-            <a:r>
-              <a:rPr lang="en-US" sz="1400" dirty="0">
-                <a:solidFill>
-                  <a:srgbClr val="9ED6E0"/>
-                </a:solidFill>
-                <a:latin typeface="Courier New" pitchFamily="34" charset="0"/>
-                <a:ea typeface="Courier New" pitchFamily="34" charset="-122"/>
-                <a:cs typeface="Courier New" pitchFamily="34" charset="-120"/>
-              </a:rPr>
-              <a:t>npm run dev</a:t>
-            </a:r>
-            <a:endParaRPr lang="en-US" sz="1400" dirty="0"/>
-          </a:p>
-        </p:txBody>
-      </p:sp>
-      <p:sp>
-        <p:nvSpPr>
-          <p:cNvPr id="7" name="Text 4"/>
-          <p:cNvSpPr txBox="1"/>
-          <p:nvPr/>
-        </p:nvSpPr>
-        <p:spPr>
-          <a:xfrm>
-            <a:off x="731520" y="5349240"/>
-            <a:ext cx="5943600" cy="457200"/>
+            <a:pPr algn="ctr" indent="0" marL="0">
+              <a:buNone/>
+            </a:pPr>
+            <a:r>
+              <a:rPr lang="en-US" sz="2800" b="1" u="sng" dirty="0">
+                <a:solidFill>
+                  <a:srgbClr val="F6C177"/>
+                </a:solidFill>
+                <a:latin typeface="Georgia" pitchFamily="34" charset="0"/>
+                <a:ea typeface="Georgia" pitchFamily="34" charset="-122"/>
+                <a:cs typeface="Georgia" pitchFamily="34" charset="-120"/>
+                <a:hlinkClick r:id="rId2" invalidUrl="" action="" tgtFrame="" tooltip="Open Monocle" history="1" highlightClick="0" endSnd="0">
+                  <a:extLst>
+                    <a:ext uri="{A12FA001-AC4F-418D-AE19-62706E023703}">
+                      <ahyp:hlinkClr xmlns:ahyp="http://schemas.microsoft.com/office/drawing/2018/hyperlinkcolor" val="tx"/>
+                    </a:ext>
+                  </a:extLst>
+                </a:hlinkClick>
+              </a:rPr>
+              <a:t>monocle-omega.vercel.app</a:t>
+            </a:r>
+            <a:endParaRPr lang="en-US" sz="2800" dirty="0"/>
+          </a:p>
+        </p:txBody>
+      </p:sp>
+      <p:sp>
+        <p:nvSpPr>
+          <p:cNvPr id="8" name="Text 5"/>
+          <p:cNvSpPr txBox="1"/>
+          <p:nvPr/>
+        </p:nvSpPr>
+        <p:spPr>
+          <a:xfrm>
+            <a:off x="731520" y="5486400"/>
+            <a:ext cx="5669280" cy="320040"/>
           </a:xfrm>
           <a:prstGeom prst="rect">
             <a:avLst/>
@@ -4888,54 +4849,36 @@
               <a:buNone/>
             </a:pPr>
             <a:r>
-              <a:rPr lang="en-US" sz="2400" b="1" dirty="0">
-                <a:solidFill>
-                  <a:srgbClr val="F6C177"/>
+              <a:rPr lang="en-US" sz="1300" dirty="0">
+                <a:solidFill>
+                  <a:srgbClr val="A7AFCC"/>
                 </a:solidFill>
                 <a:latin typeface="Calibri" pitchFamily="34" charset="0"/>
                 <a:ea typeface="Calibri" pitchFamily="34" charset="-122"/>
                 <a:cs typeface="Calibri" pitchFamily="34" charset="-120"/>
               </a:rPr>
-              <a:t>github.com/mansi0xc/monocle</a:t>
-            </a:r>
-            <a:endParaRPr lang="en-US" sz="2400" dirty="0"/>
-          </a:p>
-        </p:txBody>
-      </p:sp>
-      <p:sp>
-        <p:nvSpPr>
-          <p:cNvPr id="8" name="Text 5"/>
-          <p:cNvSpPr txBox="1"/>
-          <p:nvPr/>
-        </p:nvSpPr>
-        <p:spPr>
-          <a:xfrm>
-            <a:off x="731520" y="5852160"/>
-            <a:ext cx="5943600" cy="320040"/>
-          </a:xfrm>
-          <a:prstGeom prst="rect">
-            <a:avLst/>
-          </a:prstGeom>
-          <a:noFill/>
-          <a:ln/>
-        </p:spPr>
-        <p:txBody>
-          <a:bodyPr wrap="square" lIns="0" tIns="0" rIns="0" bIns="0" rtlCol="0" anchor="ctr"/>
-          <a:lstStyle/>
-          <a:p>
-            <a:pPr indent="0" marL="0">
-              <a:buNone/>
-            </a:pPr>
-            <a:r>
-              <a:rPr lang="en-US" sz="1300" dirty="0">
+              <a:t>Open source on GitHub: </a:t>
+            </a:r>
+            <a:pPr indent="0" marL="0">
+              <a:buNone/>
+            </a:pPr>
+            <a:r>
+              <a:rPr lang="en-US" sz="1300" u="sng" dirty="0">
                 <a:solidFill>
                   <a:srgbClr val="A7AFCC"/>
                 </a:solidFill>
                 <a:latin typeface="Calibri" pitchFamily="34" charset="0"/>
                 <a:ea typeface="Calibri" pitchFamily="34" charset="-122"/>
                 <a:cs typeface="Calibri" pitchFamily="34" charset="-120"/>
-              </a:rPr>
-              <a:t>Node 24.10+ and the pinned Rust toolchain.</a:t>
+                <a:hlinkClick r:id="rId3" invalidUrl="" action="" tgtFrame="" tooltip="" history="1" highlightClick="0" endSnd="0">
+                  <a:extLst>
+                    <a:ext uri="{A12FA001-AC4F-418D-AE19-62706E023703}">
+                      <ahyp:hlinkClr xmlns:ahyp="http://schemas.microsoft.com/office/drawing/2018/hyperlinkcolor" val="tx"/>
+                    </a:ext>
+                  </a:extLst>
+                </a:hlinkClick>
+              </a:rPr>
+              <a:t>github.com/mansi0xc/monocle</a:t>
             </a:r>
             <a:endParaRPr lang="en-US" sz="1300" dirty="0"/>
           </a:p>
@@ -5059,7 +5002,7 @@
           <p:nvPr/>
         </p:nvPicPr>
         <p:blipFill>
-          <a:blip r:embed="rId2"/>
+          <a:blip r:embed="rId4"/>
           <a:stretch>
             <a:fillRect/>
           </a:stretch>
@@ -7811,7 +7754,7 @@
                 <a:ea typeface="Georgia" pitchFamily="34" charset="-122"/>
                 <a:cs typeface="Georgia" pitchFamily="34" charset="-120"/>
               </a:rPr>
-              <a:t>Every run ends with a reason</a:t>
+              <a:t>Seven scenarios you can run today</a:t>
             </a:r>
             <a:endParaRPr lang="en-US" sz="3600" dirty="0"/>
           </a:p>
@@ -7825,12 +7768,12 @@
         </p:nvSpPr>
         <p:spPr>
           <a:xfrm>
-            <a:off x="1417320" y="1554480"/>
-            <a:ext cx="9326880" cy="4484370"/>
+            <a:off x="978408" y="1554480"/>
+            <a:ext cx="10241280" cy="4079240"/>
           </a:xfrm>
           <a:prstGeom prst="roundRect">
             <a:avLst>
-              <a:gd name="adj" fmla="val 2039"/>
+              <a:gd name="adj" fmla="val 2242"/>
             </a:avLst>
           </a:prstGeom>
           <a:solidFill>
@@ -7859,7 +7802,7 @@
         </p:nvSpPr>
         <p:spPr>
           <a:xfrm>
-            <a:off x="1554480" y="1645920"/>
+            <a:off x="1115568" y="1645920"/>
             <a:ext cx="100584" cy="100584"/>
           </a:xfrm>
           <a:prstGeom prst="ellipse">
@@ -7884,7 +7827,7 @@
         </p:nvSpPr>
         <p:spPr>
           <a:xfrm>
-            <a:off x="1737360" y="1645920"/>
+            <a:off x="1298448" y="1645920"/>
             <a:ext cx="100584" cy="100584"/>
           </a:xfrm>
           <a:prstGeom prst="ellipse">
@@ -7909,7 +7852,7 @@
         </p:nvSpPr>
         <p:spPr>
           <a:xfrm>
-            <a:off x="1920240" y="1645920"/>
+            <a:off x="1481328" y="1645920"/>
             <a:ext cx="100584" cy="100584"/>
           </a:xfrm>
           <a:prstGeom prst="ellipse">
@@ -7942,8 +7885,8 @@
         </p:blipFill>
         <p:spPr>
           <a:xfrm>
-            <a:off x="1453896" y="1828800"/>
-            <a:ext cx="9253728" cy="4173474"/>
+            <a:off x="1014984" y="1828800"/>
+            <a:ext cx="10168128" cy="3768344"/>
           </a:xfrm>
           <a:prstGeom prst="rect">
             <a:avLst/>
@@ -7958,8 +7901,8 @@
         </p:nvSpPr>
         <p:spPr>
           <a:xfrm>
-            <a:off x="1417320" y="6148578"/>
-            <a:ext cx="9326880" cy="320040"/>
+            <a:off x="978408" y="5743448"/>
+            <a:ext cx="10241280" cy="320040"/>
           </a:xfrm>
           <a:prstGeom prst="rect">
             <a:avLst/>
@@ -8617,11 +8560,11 @@
         <p:spPr>
           <a:xfrm>
             <a:off x="6217920" y="1828800"/>
-            <a:ext cx="5394960" cy="3695514"/>
+            <a:ext cx="5394960" cy="3563930"/>
           </a:xfrm>
           <a:prstGeom prst="roundRect">
             <a:avLst>
-              <a:gd name="adj" fmla="val 2474"/>
+              <a:gd name="adj" fmla="val 2566"/>
             </a:avLst>
           </a:prstGeom>
           <a:solidFill>
@@ -8734,7 +8677,7 @@
         <p:spPr>
           <a:xfrm>
             <a:off x="6254496" y="2103120"/>
-            <a:ext cx="5321808" cy="3384618"/>
+            <a:ext cx="5321808" cy="3253034"/>
           </a:xfrm>
           <a:prstGeom prst="rect">
             <a:avLst/>
@@ -8749,7 +8692,7 @@
         </p:nvSpPr>
         <p:spPr>
           <a:xfrm>
-            <a:off x="6217920" y="5707194"/>
+            <a:off x="6217920" y="5575610"/>
             <a:ext cx="5394960" cy="548640"/>
           </a:xfrm>
           <a:prstGeom prst="rect">
@@ -8788,7 +8731,7 @@
         </p:nvSpPr>
         <p:spPr>
           <a:xfrm>
-            <a:off x="6217920" y="6301554"/>
+            <a:off x="6217920" y="6169970"/>
             <a:ext cx="5394960" cy="822960"/>
           </a:xfrm>
           <a:prstGeom prst="rect">
@@ -9332,7 +9275,7 @@
         </p:nvSpPr>
         <p:spPr>
           <a:xfrm>
-            <a:off x="5212080" y="914400"/>
+            <a:off x="5212080" y="1394460"/>
             <a:ext cx="6400800" cy="3611880"/>
           </a:xfrm>
           <a:prstGeom prst="roundRect">
@@ -9366,7 +9309,7 @@
         </p:nvSpPr>
         <p:spPr>
           <a:xfrm>
-            <a:off x="5349240" y="1005840"/>
+            <a:off x="5349240" y="1485900"/>
             <a:ext cx="100584" cy="100584"/>
           </a:xfrm>
           <a:prstGeom prst="ellipse">
@@ -9391,7 +9334,7 @@
         </p:nvSpPr>
         <p:spPr>
           <a:xfrm>
-            <a:off x="5532120" y="1005840"/>
+            <a:off x="5532120" y="1485900"/>
             <a:ext cx="100584" cy="100584"/>
           </a:xfrm>
           <a:prstGeom prst="ellipse">
@@ -9416,7 +9359,7 @@
         </p:nvSpPr>
         <p:spPr>
           <a:xfrm>
-            <a:off x="5715000" y="1005840"/>
+            <a:off x="5715000" y="1485900"/>
             <a:ext cx="100584" cy="100584"/>
           </a:xfrm>
           <a:prstGeom prst="ellipse">
@@ -9449,7 +9392,7 @@
         </p:blipFill>
         <p:spPr>
           <a:xfrm>
-            <a:off x="5248656" y="1188720"/>
+            <a:off x="5248656" y="1668780"/>
             <a:ext cx="6327648" cy="3300984"/>
           </a:xfrm>
           <a:prstGeom prst="rect">
@@ -10383,7 +10326,7 @@
                 <a:ea typeface="Georgia" pitchFamily="34" charset="-122"/>
                 <a:cs typeface="Georgia" pitchFamily="34" charset="-120"/>
               </a:rPr>
-              <a:t>When context is missing, Monocle says so</a:t>
+              <a:t>Real network data, an honest answer</a:t>
             </a:r>
             <a:endParaRPr lang="en-US" sz="3600" dirty="0"/>
           </a:p>
@@ -10708,47 +10651,47 @@
 </file>
 
 <file path=ppt/theme/theme1.xml><?xml version="1.0" encoding="utf-8"?>
-<a:theme xmlns:a="http://schemas.openxmlformats.org/drawingml/2006/main" name="Office Theme">
+<a:theme xmlns:a="http://schemas.openxmlformats.org/drawingml/2006/main" name="Monocle Dusk">
   <a:themeElements>
-    <a:clrScheme name="Office">
+    <a:clrScheme name="Monocle Dusk">
       <a:dk1>
-        <a:sysClr val="windowText" lastClr="000000"/>
+        <a:srgbClr val="12172B"/>
       </a:dk1>
       <a:lt1>
-        <a:sysClr val="window" lastClr="FFFFFF"/>
+        <a:srgbClr val="EEF1F8"/>
       </a:lt1>
       <a:dk2>
-        <a:srgbClr val="44546A"/>
+        <a:srgbClr val="1D2546"/>
       </a:dk2>
       <a:lt2>
-        <a:srgbClr val="E7E6E6"/>
+        <a:srgbClr val="A7AFCC"/>
       </a:lt2>
       <a:accent1>
-        <a:srgbClr val="4472C4"/>
+        <a:srgbClr val="F6C177"/>
       </a:accent1>
       <a:accent2>
-        <a:srgbClr val="ED7D31"/>
+        <a:srgbClr val="F29484"/>
       </a:accent2>
       <a:accent3>
-        <a:srgbClr val="A5A5A5"/>
+        <a:srgbClr val="C77DA8"/>
       </a:accent3>
       <a:accent4>
-        <a:srgbClr val="FFC000"/>
+        <a:srgbClr val="9ED6E0"/>
       </a:accent4>
       <a:accent5>
-        <a:srgbClr val="5B9BD5"/>
+        <a:srgbClr val="232C52"/>
       </a:accent5>
       <a:accent6>
-        <a:srgbClr val="70AD47"/>
+        <a:srgbClr val="8C95B9"/>
       </a:accent6>
       <a:hlink>
-        <a:srgbClr val="0563C1"/>
+        <a:srgbClr val="F6C177"/>
       </a:hlink>
       <a:folHlink>
-        <a:srgbClr val="954F72"/>
+        <a:srgbClr val="C77DA8"/>
       </a:folHlink>
     </a:clrScheme>
-    <a:fontScheme name="Office">
+    <a:fontScheme name="Monocle Dusk">
       <a:majorFont>
         <a:latin typeface="Calibri Light" panose="020F0302020204030204"/>
         <a:ea typeface=""/>
